--- a/assets/Lost_Limb_Riders_Trinity_Healthcare_Partnership_REBUILT-2.pptx
+++ b/assets/Lost_Limb_Riders_Trinity_Healthcare_Partnership_REBUILT-2.pptx
@@ -2218,6 +2218,30 @@
           </a:p>
         </p:txBody>
       </p:sp>
+      <p:pic>
+        <p:nvPicPr>
+          <p:cNvPr id="15" name="Picture 14" descr="logo-nobg.png"/>
+          <p:cNvPicPr>
+            <a:picLocks noChangeAspect="1"/>
+          </p:cNvPicPr>
+          <p:nvPr/>
+        </p:nvPicPr>
+        <p:blipFill>
+          <a:blip r:embed="rId3"/>
+          <a:stretch>
+            <a:fillRect/>
+          </a:stretch>
+        </p:blipFill>
+        <p:spPr>
+          <a:xfrm>
+            <a:off x="365760" y="274320"/>
+            <a:ext cx="1005840" cy="1005840"/>
+          </a:xfrm>
+          <a:prstGeom prst="rect">
+            <a:avLst/>
+          </a:prstGeom>
+        </p:spPr>
+      </p:pic>
     </p:spTree>
   </p:cSld>
   <p:clrMapOvr>
@@ -2544,6 +2568,30 @@
           </a:p>
         </p:txBody>
       </p:sp>
+      <p:pic>
+        <p:nvPicPr>
+          <p:cNvPr id="10" name="Picture 9" descr="logo-nobg.png"/>
+          <p:cNvPicPr>
+            <a:picLocks noChangeAspect="1"/>
+          </p:cNvPicPr>
+          <p:nvPr/>
+        </p:nvPicPr>
+        <p:blipFill>
+          <a:blip r:embed="rId3"/>
+          <a:stretch>
+            <a:fillRect/>
+          </a:stretch>
+        </p:blipFill>
+        <p:spPr>
+          <a:xfrm>
+            <a:off x="11414760" y="6217920"/>
+            <a:ext cx="502920" cy="502920"/>
+          </a:xfrm>
+          <a:prstGeom prst="rect">
+            <a:avLst/>
+          </a:prstGeom>
+        </p:spPr>
+      </p:pic>
     </p:spTree>
   </p:cSld>
   <p:clrMapOvr>
@@ -2995,6 +3043,30 @@
           </a:p>
         </p:txBody>
       </p:sp>
+      <p:pic>
+        <p:nvPicPr>
+          <p:cNvPr id="13" name="Picture 12" descr="logo-nobg.png"/>
+          <p:cNvPicPr>
+            <a:picLocks noChangeAspect="1"/>
+          </p:cNvPicPr>
+          <p:nvPr/>
+        </p:nvPicPr>
+        <p:blipFill>
+          <a:blip r:embed="rId3"/>
+          <a:stretch>
+            <a:fillRect/>
+          </a:stretch>
+        </p:blipFill>
+        <p:spPr>
+          <a:xfrm>
+            <a:off x="11414760" y="6217920"/>
+            <a:ext cx="502920" cy="502920"/>
+          </a:xfrm>
+          <a:prstGeom prst="rect">
+            <a:avLst/>
+          </a:prstGeom>
+        </p:spPr>
+      </p:pic>
     </p:spTree>
   </p:cSld>
   <p:clrMapOvr>
@@ -3478,6 +3550,30 @@
           </a:p>
         </p:txBody>
       </p:sp>
+      <p:pic>
+        <p:nvPicPr>
+          <p:cNvPr id="14" name="Picture 13" descr="logo-nobg.png"/>
+          <p:cNvPicPr>
+            <a:picLocks noChangeAspect="1"/>
+          </p:cNvPicPr>
+          <p:nvPr/>
+        </p:nvPicPr>
+        <p:blipFill>
+          <a:blip r:embed="rId3"/>
+          <a:stretch>
+            <a:fillRect/>
+          </a:stretch>
+        </p:blipFill>
+        <p:spPr>
+          <a:xfrm>
+            <a:off x="11414760" y="6217920"/>
+            <a:ext cx="502920" cy="502920"/>
+          </a:xfrm>
+          <a:prstGeom prst="rect">
+            <a:avLst/>
+          </a:prstGeom>
+        </p:spPr>
+      </p:pic>
     </p:spTree>
   </p:cSld>
   <p:clrMapOvr>
@@ -4188,6 +4284,30 @@
           </a:p>
         </p:txBody>
       </p:sp>
+      <p:pic>
+        <p:nvPicPr>
+          <p:cNvPr id="19" name="Picture 18" descr="logo-nobg.png"/>
+          <p:cNvPicPr>
+            <a:picLocks noChangeAspect="1"/>
+          </p:cNvPicPr>
+          <p:nvPr/>
+        </p:nvPicPr>
+        <p:blipFill>
+          <a:blip r:embed="rId3"/>
+          <a:stretch>
+            <a:fillRect/>
+          </a:stretch>
+        </p:blipFill>
+        <p:spPr>
+          <a:xfrm>
+            <a:off x="11414760" y="6217920"/>
+            <a:ext cx="502920" cy="502920"/>
+          </a:xfrm>
+          <a:prstGeom prst="rect">
+            <a:avLst/>
+          </a:prstGeom>
+        </p:spPr>
+      </p:pic>
     </p:spTree>
   </p:cSld>
   <p:clrMapOvr>
@@ -4565,6 +4685,30 @@
           </a:p>
         </p:txBody>
       </p:sp>
+      <p:pic>
+        <p:nvPicPr>
+          <p:cNvPr id="11" name="Picture 10" descr="logo-nobg.png"/>
+          <p:cNvPicPr>
+            <a:picLocks noChangeAspect="1"/>
+          </p:cNvPicPr>
+          <p:nvPr/>
+        </p:nvPicPr>
+        <p:blipFill>
+          <a:blip r:embed="rId3"/>
+          <a:stretch>
+            <a:fillRect/>
+          </a:stretch>
+        </p:blipFill>
+        <p:spPr>
+          <a:xfrm>
+            <a:off x="11414760" y="6217920"/>
+            <a:ext cx="502920" cy="502920"/>
+          </a:xfrm>
+          <a:prstGeom prst="rect">
+            <a:avLst/>
+          </a:prstGeom>
+        </p:spPr>
+      </p:pic>
     </p:spTree>
   </p:cSld>
   <p:clrMapOvr>
@@ -5027,6 +5171,30 @@
           </a:p>
         </p:txBody>
       </p:sp>
+      <p:pic>
+        <p:nvPicPr>
+          <p:cNvPr id="13" name="Picture 12" descr="logo-nobg.png"/>
+          <p:cNvPicPr>
+            <a:picLocks noChangeAspect="1"/>
+          </p:cNvPicPr>
+          <p:nvPr/>
+        </p:nvPicPr>
+        <p:blipFill>
+          <a:blip r:embed="rId3"/>
+          <a:stretch>
+            <a:fillRect/>
+          </a:stretch>
+        </p:blipFill>
+        <p:spPr>
+          <a:xfrm>
+            <a:off x="11414760" y="6217920"/>
+            <a:ext cx="502920" cy="502920"/>
+          </a:xfrm>
+          <a:prstGeom prst="rect">
+            <a:avLst/>
+          </a:prstGeom>
+        </p:spPr>
+      </p:pic>
     </p:spTree>
   </p:cSld>
   <p:clrMapOvr>
@@ -5494,6 +5662,30 @@
           </a:p>
         </p:txBody>
       </p:sp>
+      <p:pic>
+        <p:nvPicPr>
+          <p:cNvPr id="12" name="Picture 11" descr="logo-nobg.png"/>
+          <p:cNvPicPr>
+            <a:picLocks noChangeAspect="1"/>
+          </p:cNvPicPr>
+          <p:nvPr/>
+        </p:nvPicPr>
+        <p:blipFill>
+          <a:blip r:embed="rId3"/>
+          <a:stretch>
+            <a:fillRect/>
+          </a:stretch>
+        </p:blipFill>
+        <p:spPr>
+          <a:xfrm>
+            <a:off x="11414760" y="6217920"/>
+            <a:ext cx="502920" cy="502920"/>
+          </a:xfrm>
+          <a:prstGeom prst="rect">
+            <a:avLst/>
+          </a:prstGeom>
+        </p:spPr>
+      </p:pic>
     </p:spTree>
   </p:cSld>
   <p:clrMapOvr>
@@ -6310,6 +6502,30 @@
           </a:p>
         </p:txBody>
       </p:sp>
+      <p:pic>
+        <p:nvPicPr>
+          <p:cNvPr id="24" name="Picture 23" descr="logo-nobg.png"/>
+          <p:cNvPicPr>
+            <a:picLocks noChangeAspect="1"/>
+          </p:cNvPicPr>
+          <p:nvPr/>
+        </p:nvPicPr>
+        <p:blipFill>
+          <a:blip r:embed="rId3"/>
+          <a:stretch>
+            <a:fillRect/>
+          </a:stretch>
+        </p:blipFill>
+        <p:spPr>
+          <a:xfrm>
+            <a:off x="11414760" y="6217920"/>
+            <a:ext cx="502920" cy="502920"/>
+          </a:xfrm>
+          <a:prstGeom prst="rect">
+            <a:avLst/>
+          </a:prstGeom>
+        </p:spPr>
+      </p:pic>
     </p:spTree>
   </p:cSld>
   <p:clrMapOvr>
@@ -7057,6 +7273,30 @@
           </a:p>
         </p:txBody>
       </p:sp>
+      <p:pic>
+        <p:nvPicPr>
+          <p:cNvPr id="22" name="Picture 21" descr="logo-nobg.png"/>
+          <p:cNvPicPr>
+            <a:picLocks noChangeAspect="1"/>
+          </p:cNvPicPr>
+          <p:nvPr/>
+        </p:nvPicPr>
+        <p:blipFill>
+          <a:blip r:embed="rId3"/>
+          <a:stretch>
+            <a:fillRect/>
+          </a:stretch>
+        </p:blipFill>
+        <p:spPr>
+          <a:xfrm>
+            <a:off x="11414760" y="6217920"/>
+            <a:ext cx="502920" cy="502920"/>
+          </a:xfrm>
+          <a:prstGeom prst="rect">
+            <a:avLst/>
+          </a:prstGeom>
+        </p:spPr>
+      </p:pic>
     </p:spTree>
   </p:cSld>
   <p:clrMapOvr>
@@ -7882,6 +8122,30 @@
           </a:p>
         </p:txBody>
       </p:sp>
+      <p:pic>
+        <p:nvPicPr>
+          <p:cNvPr id="26" name="Picture 25" descr="logo-nobg.png"/>
+          <p:cNvPicPr>
+            <a:picLocks noChangeAspect="1"/>
+          </p:cNvPicPr>
+          <p:nvPr/>
+        </p:nvPicPr>
+        <p:blipFill>
+          <a:blip r:embed="rId3"/>
+          <a:stretch>
+            <a:fillRect/>
+          </a:stretch>
+        </p:blipFill>
+        <p:spPr>
+          <a:xfrm>
+            <a:off x="11414760" y="6217920"/>
+            <a:ext cx="502920" cy="502920"/>
+          </a:xfrm>
+          <a:prstGeom prst="rect">
+            <a:avLst/>
+          </a:prstGeom>
+        </p:spPr>
+      </p:pic>
     </p:spTree>
   </p:cSld>
   <p:clrMapOvr>
